--- a/Phát hiện đối tượng có thể mở rộng với YOLOv5.pptx
+++ b/Phát hiện đối tượng có thể mở rộng với YOLOv5.pptx
@@ -925,7 +925,7 @@
       <dgm:prSet phldrT="[Text]" phldr="0" custT="1"/>
       <dgm:spPr>
         <a:solidFill>
-          <a:schemeClr val="accent2"/>
+          <a:schemeClr val="accent1"/>
         </a:solidFill>
       </dgm:spPr>
       <dgm:t>
@@ -1448,7 +1448,7 @@
       <dgm:prSet phldrT="[Text]" phldr="0" custT="1"/>
       <dgm:spPr>
         <a:solidFill>
-          <a:schemeClr val="accent2"/>
+          <a:schemeClr val="accent1"/>
         </a:solidFill>
       </dgm:spPr>
       <dgm:t>
@@ -1812,7 +1812,7 @@
       <dgm:prSet phldrT="[Text]" custT="1"/>
       <dgm:spPr>
         <a:solidFill>
-          <a:schemeClr val="accent2"/>
+          <a:schemeClr val="accent1"/>
         </a:solidFill>
       </dgm:spPr>
       <dgm:t>
@@ -2056,7 +2056,7 @@
           <a:avLst/>
         </a:prstGeom>
         <a:solidFill>
-          <a:schemeClr val="accent2"/>
+          <a:schemeClr val="accent1"/>
         </a:solidFill>
         <a:ln>
           <a:noFill/>
@@ -2805,7 +2805,7 @@
           <a:avLst/>
         </a:prstGeom>
         <a:solidFill>
-          <a:schemeClr val="accent2"/>
+          <a:schemeClr val="accent1"/>
         </a:solidFill>
         <a:ln>
           <a:noFill/>
@@ -3000,7 +3000,7 @@
           <a:avLst/>
         </a:prstGeom>
         <a:solidFill>
-          <a:schemeClr val="accent2"/>
+          <a:schemeClr val="accent1"/>
         </a:solidFill>
         <a:ln>
           <a:noFill/>
@@ -4950,7 +4950,7 @@
           <a:p>
             <a:fld id="{8BC1DDA1-CF24-47E0-B168-39F7F31B8D63}" type="datetimeFigureOut">
               <a:rPr lang="en-US" smtClean="0"/>
-              <a:t>Wed 26/08/2026</a:t>
+              <a:t>Sat 29/08/2026</a:t>
             </a:fld>
             <a:endParaRPr lang="en-US"/>
           </a:p>
@@ -5780,7 +5780,7 @@
           <a:p>
             <a:fld id="{56C9138F-F192-488C-824A-7D8B4E7472EB}" type="datetime1">
               <a:rPr lang="en-US" smtClean="0"/>
-              <a:t>Wed 26/08/2026</a:t>
+              <a:t>Sat 29/08/2026</a:t>
             </a:fld>
             <a:endParaRPr lang="en-US"/>
           </a:p>
@@ -5948,7 +5948,7 @@
           <a:p>
             <a:fld id="{706A647D-8FE2-4407-AA62-AE2FC4406F10}" type="datetime1">
               <a:rPr lang="en-US" smtClean="0"/>
-              <a:t>Wed 26/08/2026</a:t>
+              <a:t>Sat 29/08/2026</a:t>
             </a:fld>
             <a:endParaRPr lang="en-US"/>
           </a:p>
@@ -6126,7 +6126,7 @@
           <a:p>
             <a:fld id="{314213E3-BB5E-4902-81EB-F5FF1D665E24}" type="datetime1">
               <a:rPr lang="en-US" smtClean="0"/>
-              <a:t>Wed 26/08/2026</a:t>
+              <a:t>Sat 29/08/2026</a:t>
             </a:fld>
             <a:endParaRPr lang="en-US"/>
           </a:p>
@@ -6294,7 +6294,7 @@
           <a:p>
             <a:fld id="{A288A26A-F886-412E-8B31-E0A2B59019B0}" type="datetime1">
               <a:rPr lang="en-US" smtClean="0"/>
-              <a:t>Wed 26/08/2026</a:t>
+              <a:t>Sat 29/08/2026</a:t>
             </a:fld>
             <a:endParaRPr lang="en-US"/>
           </a:p>
@@ -6539,7 +6539,7 @@
           <a:p>
             <a:fld id="{A1F1A446-899A-4245-B328-03256BEE345D}" type="datetime1">
               <a:rPr lang="en-US" smtClean="0"/>
-              <a:t>Wed 26/08/2026</a:t>
+              <a:t>Sat 29/08/2026</a:t>
             </a:fld>
             <a:endParaRPr lang="en-US"/>
           </a:p>
@@ -6824,7 +6824,7 @@
           <a:p>
             <a:fld id="{3B7CD892-C122-4073-89B2-DE46E0C464C1}" type="datetime1">
               <a:rPr lang="en-US" smtClean="0"/>
-              <a:t>Wed 26/08/2026</a:t>
+              <a:t>Sat 29/08/2026</a:t>
             </a:fld>
             <a:endParaRPr lang="en-US"/>
           </a:p>
@@ -7243,7 +7243,7 @@
           <a:p>
             <a:fld id="{2EA810FD-9D03-46C4-B9F1-BF7A6E61A6A0}" type="datetime1">
               <a:rPr lang="en-US" smtClean="0"/>
-              <a:t>Wed 26/08/2026</a:t>
+              <a:t>Sat 29/08/2026</a:t>
             </a:fld>
             <a:endParaRPr lang="en-US"/>
           </a:p>
@@ -7360,7 +7360,7 @@
           <a:p>
             <a:fld id="{22B9CC15-5DA5-420F-85B6-5DFBE28E7784}" type="datetime1">
               <a:rPr lang="en-US" smtClean="0"/>
-              <a:t>Wed 26/08/2026</a:t>
+              <a:t>Sat 29/08/2026</a:t>
             </a:fld>
             <a:endParaRPr lang="en-US"/>
           </a:p>
@@ -7455,7 +7455,7 @@
           <a:p>
             <a:fld id="{A9B7CC9E-4702-4754-A9EE-704AFDC53973}" type="datetime1">
               <a:rPr lang="en-US" smtClean="0"/>
-              <a:t>Wed 26/08/2026</a:t>
+              <a:t>Sat 29/08/2026</a:t>
             </a:fld>
             <a:endParaRPr lang="en-US"/>
           </a:p>
@@ -7730,7 +7730,7 @@
           <a:p>
             <a:fld id="{83DD41CA-3DBA-4222-B87D-017B0E8A8F93}" type="datetime1">
               <a:rPr lang="en-US" smtClean="0"/>
-              <a:t>Wed 26/08/2026</a:t>
+              <a:t>Sat 29/08/2026</a:t>
             </a:fld>
             <a:endParaRPr lang="en-US"/>
           </a:p>
@@ -7982,7 +7982,7 @@
           <a:p>
             <a:fld id="{9D449CE2-718A-4D67-A7D0-199D3AA2CA90}" type="datetime1">
               <a:rPr lang="en-US" smtClean="0"/>
-              <a:t>Wed 26/08/2026</a:t>
+              <a:t>Sat 29/08/2026</a:t>
             </a:fld>
             <a:endParaRPr lang="en-US"/>
           </a:p>
@@ -8193,7 +8193,7 @@
           <a:p>
             <a:fld id="{4AB03D72-D247-460F-ABD4-58A1C40F39B7}" type="datetime1">
               <a:rPr lang="en-US" smtClean="0"/>
-              <a:t>Wed 26/08/2026</a:t>
+              <a:t>Sat 29/08/2026</a:t>
             </a:fld>
             <a:endParaRPr lang="en-US"/>
           </a:p>
@@ -18944,20 +18944,20 @@
               <a:t> </a:t>
             </a:r>
             <a:r>
-              <a:rPr sz="2000" b="0" i="0" u="none" dirty="0" err="1">
-                <a:solidFill>
-                  <a:srgbClr val="2C3E50"/>
-                </a:solidFill>
-                <a:effectLst>
-                  <a:outerShdw blurRad="38100" dist="38100" dir="2700000" algn="tl">
-                    <a:srgbClr val="000000">
-                      <a:alpha val="43137"/>
-                    </a:srgbClr>
-                  </a:outerShdw>
-                </a:effectLst>
-                <a:latin typeface="Open Sans"/>
-              </a:rPr>
-              <a:t>và</a:t>
+              <a:rPr lang="en-US" sz="2000" b="0" i="0" u="none" dirty="0">
+                <a:solidFill>
+                  <a:srgbClr val="2C3E50"/>
+                </a:solidFill>
+                <a:effectLst>
+                  <a:outerShdw blurRad="38100" dist="38100" dir="2700000" algn="tl">
+                    <a:srgbClr val="000000">
+                      <a:alpha val="43137"/>
+                    </a:srgbClr>
+                  </a:outerShdw>
+                </a:effectLst>
+                <a:latin typeface="Open Sans"/>
+              </a:rPr>
+              <a:t>&amp;</a:t>
             </a:r>
             <a:r>
               <a:rPr sz="2000" b="0" i="0" u="none" dirty="0">
@@ -20165,7 +20165,7 @@
           <p:nvPr>
             <p:extLst>
               <p:ext uri="{D42A27DB-BD31-4B8C-83A1-F6EECF244321}">
-                <p14:modId xmlns:p14="http://schemas.microsoft.com/office/powerpoint/2010/main" val="2335288128"/>
+                <p14:modId xmlns:p14="http://schemas.microsoft.com/office/powerpoint/2010/main" val="3086312371"/>
               </p:ext>
             </p:extLst>
           </p:nvPr>
